--- a/mon/toan/slide/lop10/Slide_TOAN10_CD1_Bai1_T1-5.pptx
+++ b/mon/toan/slide/lop10/Slide_TOAN10_CD1_Bai1_T1-5.pptx
@@ -3346,7 +3346,7 @@
                 </a:solidFill>
                 <a:latin typeface="Calibri"/>
               </a:rPr>
-              <a:t>GV soạn: Trương Tử Trang – Trường THPT Vĩnh Thạnh</a:t>
+              <a:t>GV soạn: TTT – Trường THPT</a:t>
             </a:r>
           </a:p>
         </p:txBody>
@@ -9794,50 +9794,6 @@
       <p:grpSpPr/>
       <p:sp>
         <p:nvSpPr>
-          <p:cNvPr id="2" name="Rectangle 1"/>
-          <p:cNvSpPr/>
-          <p:nvPr/>
-        </p:nvSpPr>
-        <p:spPr>
-          <a:xfrm>
-            <a:off x="457200" y="384048"/>
-            <a:ext cx="109728" cy="658368"/>
-          </a:xfrm>
-          <a:prstGeom prst="rect">
-            <a:avLst/>
-          </a:prstGeom>
-          <a:solidFill>
-            <a:srgbClr val="1E40AF"/>
-          </a:solidFill>
-          <a:ln>
-            <a:noFill/>
-          </a:ln>
-          <a:effectLst/>
-        </p:spPr>
-        <p:style>
-          <a:lnRef idx="1">
-            <a:schemeClr val="accent1"/>
-          </a:lnRef>
-          <a:fillRef idx="3">
-            <a:schemeClr val="accent1"/>
-          </a:fillRef>
-          <a:effectRef idx="2">
-            <a:schemeClr val="accent1"/>
-          </a:effectRef>
-          <a:fontRef idx="minor">
-            <a:schemeClr val="lt1"/>
-          </a:fontRef>
-        </p:style>
-        <p:txBody>
-          <a:bodyPr rtlCol="0" anchor="ctr"/>
-          <a:lstStyle/>
-          <a:p>
-            <a:pPr algn="ctr"/>
-          </a:p>
-        </p:txBody>
-      </p:sp>
-      <p:sp>
-        <p:nvSpPr>
           <p:cNvPr id="3" name="TextBox 2"/>
           <p:cNvSpPr txBox="1"/>
           <p:nvPr/>
@@ -9949,30 +9905,1589 @@
           </a:p>
         </p:txBody>
       </p:sp>
-      <p:pic>
-        <p:nvPicPr>
-          <p:cNvPr id="6" name="Picture 5" descr="rId19.png"/>
-          <p:cNvPicPr>
-            <a:picLocks noChangeAspect="1"/>
-          </p:cNvPicPr>
-          <p:nvPr/>
-        </p:nvPicPr>
-        <p:blipFill>
-          <a:blip r:embed="rId2"/>
-          <a:stretch>
-            <a:fillRect/>
-          </a:stretch>
-        </p:blipFill>
-        <p:spPr>
-          <a:xfrm>
-            <a:off x="2452400" y="1417320"/>
-            <a:ext cx="7256720" cy="4800600"/>
-          </a:xfrm>
-          <a:prstGeom prst="rect">
-            <a:avLst/>
-          </a:prstGeom>
-        </p:spPr>
-      </p:pic>
+      <p:cxnSp>
+        <p:nvCxnSpPr>
+          <p:cNvPr id="6" name="Connector 5"/>
+          <p:cNvCxnSpPr/>
+          <p:nvPr/>
+        </p:nvCxnSpPr>
+        <p:spPr>
+          <a:xfrm flipH="1" flipV="1">
+            <a:off x="4338888" y="2670962"/>
+            <a:ext cx="1688379" cy="1283818"/>
+          </a:xfrm>
+          <a:prstGeom prst="line">
+            <a:avLst/>
+          </a:prstGeom>
+          <a:ln w="44450">
+            <a:solidFill>
+              <a:srgbClr val="548235"/>
+            </a:solidFill>
+          </a:ln>
+        </p:spPr>
+        <p:style>
+          <a:lnRef idx="2">
+            <a:schemeClr val="accent1"/>
+          </a:lnRef>
+          <a:fillRef idx="0">
+            <a:schemeClr val="accent1"/>
+          </a:fillRef>
+          <a:effectRef idx="1">
+            <a:schemeClr val="accent1"/>
+          </a:effectRef>
+          <a:fontRef idx="minor">
+            <a:schemeClr val="tx1"/>
+          </a:fontRef>
+        </p:style>
+      </p:cxnSp>
+      <p:cxnSp>
+        <p:nvCxnSpPr>
+          <p:cNvPr id="7" name="Connector 6"/>
+          <p:cNvCxnSpPr/>
+          <p:nvPr/>
+        </p:nvCxnSpPr>
+        <p:spPr>
+          <a:xfrm flipH="1" flipV="1">
+            <a:off x="2678925" y="2144161"/>
+            <a:ext cx="1659963" cy="526801"/>
+          </a:xfrm>
+          <a:prstGeom prst="line">
+            <a:avLst/>
+          </a:prstGeom>
+          <a:ln w="15875">
+            <a:solidFill>
+              <a:srgbClr val="548235"/>
+            </a:solidFill>
+          </a:ln>
+        </p:spPr>
+        <p:style>
+          <a:lnRef idx="2">
+            <a:schemeClr val="accent1"/>
+          </a:lnRef>
+          <a:fillRef idx="0">
+            <a:schemeClr val="accent1"/>
+          </a:fillRef>
+          <a:effectRef idx="1">
+            <a:schemeClr val="accent1"/>
+          </a:effectRef>
+          <a:fontRef idx="minor">
+            <a:schemeClr val="tx1"/>
+          </a:fontRef>
+        </p:style>
+      </p:cxnSp>
+      <p:sp>
+        <p:nvSpPr>
+          <p:cNvPr id="8" name="Rounded Rectangle 7"/>
+          <p:cNvSpPr/>
+          <p:nvPr/>
+        </p:nvSpPr>
+        <p:spPr>
+          <a:xfrm>
+            <a:off x="933716" y="1867849"/>
+            <a:ext cx="1745209" cy="552622"/>
+          </a:xfrm>
+          <a:prstGeom prst="roundRect">
+            <a:avLst>
+              <a:gd name="adj" fmla="val 50000"/>
+            </a:avLst>
+          </a:prstGeom>
+          <a:solidFill>
+            <a:srgbClr val="EDF5E8"/>
+          </a:solidFill>
+          <a:ln w="15875">
+            <a:solidFill>
+              <a:srgbClr val="548235"/>
+            </a:solidFill>
+          </a:ln>
+          <a:effectLst/>
+        </p:spPr>
+        <p:style>
+          <a:lnRef idx="1">
+            <a:schemeClr val="accent1"/>
+          </a:lnRef>
+          <a:fillRef idx="3">
+            <a:schemeClr val="accent1"/>
+          </a:fillRef>
+          <a:effectRef idx="2">
+            <a:schemeClr val="accent1"/>
+          </a:effectRef>
+          <a:fontRef idx="minor">
+            <a:schemeClr val="lt1"/>
+          </a:fontRef>
+        </p:style>
+        <p:txBody>
+          <a:bodyPr rtlCol="0" anchor="ctr" wrap="none" lIns="64000" rIns="64000" tIns="25400" bIns="25400"/>
+          <a:lstStyle/>
+          <a:p>
+            <a:pPr algn="ctr"/>
+            <a:r>
+              <a:rPr sz="1300" b="0">
+                <a:solidFill>
+                  <a:srgbClr val="000000"/>
+                </a:solidFill>
+                <a:latin typeface="Calibri"/>
+              </a:rPr>
+              <a:t>3 phương trình, 3</a:t>
+            </a:r>
+          </a:p>
+          <a:p>
+            <a:pPr algn="ctr"/>
+            <a:r>
+              <a:rPr sz="1300" b="0">
+                <a:solidFill>
+                  <a:srgbClr val="000000"/>
+                </a:solidFill>
+                <a:latin typeface="Calibri"/>
+              </a:rPr>
+              <a:t>ẩn x, y, z</a:t>
+            </a:r>
+          </a:p>
+        </p:txBody>
+      </p:sp>
+      <p:cxnSp>
+        <p:nvCxnSpPr>
+          <p:cNvPr id="9" name="Connector 8"/>
+          <p:cNvCxnSpPr/>
+          <p:nvPr/>
+        </p:nvCxnSpPr>
+        <p:spPr>
+          <a:xfrm flipH="1">
+            <a:off x="2764777" y="2670962"/>
+            <a:ext cx="1574111" cy="100711"/>
+          </a:xfrm>
+          <a:prstGeom prst="line">
+            <a:avLst/>
+          </a:prstGeom>
+          <a:ln w="15875">
+            <a:solidFill>
+              <a:srgbClr val="548235"/>
+            </a:solidFill>
+          </a:ln>
+        </p:spPr>
+        <p:style>
+          <a:lnRef idx="2">
+            <a:schemeClr val="accent1"/>
+          </a:lnRef>
+          <a:fillRef idx="0">
+            <a:schemeClr val="accent1"/>
+          </a:fillRef>
+          <a:effectRef idx="1">
+            <a:schemeClr val="accent1"/>
+          </a:effectRef>
+          <a:fontRef idx="minor">
+            <a:schemeClr val="tx1"/>
+          </a:fontRef>
+        </p:style>
+      </p:cxnSp>
+      <p:sp>
+        <p:nvSpPr>
+          <p:cNvPr id="10" name="Rounded Rectangle 9"/>
+          <p:cNvSpPr/>
+          <p:nvPr/>
+        </p:nvSpPr>
+        <p:spPr>
+          <a:xfrm>
+            <a:off x="847864" y="2495362"/>
+            <a:ext cx="1916913" cy="552622"/>
+          </a:xfrm>
+          <a:prstGeom prst="roundRect">
+            <a:avLst>
+              <a:gd name="adj" fmla="val 50000"/>
+            </a:avLst>
+          </a:prstGeom>
+          <a:solidFill>
+            <a:srgbClr val="EDF5E8"/>
+          </a:solidFill>
+          <a:ln w="15875">
+            <a:solidFill>
+              <a:srgbClr val="548235"/>
+            </a:solidFill>
+          </a:ln>
+          <a:effectLst/>
+        </p:spPr>
+        <p:style>
+          <a:lnRef idx="1">
+            <a:schemeClr val="accent1"/>
+          </a:lnRef>
+          <a:fillRef idx="3">
+            <a:schemeClr val="accent1"/>
+          </a:fillRef>
+          <a:effectRef idx="2">
+            <a:schemeClr val="accent1"/>
+          </a:effectRef>
+          <a:fontRef idx="minor">
+            <a:schemeClr val="lt1"/>
+          </a:fontRef>
+        </p:style>
+        <p:txBody>
+          <a:bodyPr rtlCol="0" anchor="ctr" wrap="none" lIns="64000" rIns="64000" tIns="25400" bIns="25400"/>
+          <a:lstStyle/>
+          <a:p>
+            <a:pPr algn="ctr"/>
+            <a:r>
+              <a:rPr sz="1300" b="0">
+                <a:solidFill>
+                  <a:srgbClr val="000000"/>
+                </a:solidFill>
+                <a:latin typeface="Calibri"/>
+              </a:rPr>
+              <a:t>Nghiệm (x₀; y₀; z₀)</a:t>
+            </a:r>
+          </a:p>
+          <a:p>
+            <a:pPr algn="ctr"/>
+            <a:r>
+              <a:rPr sz="1300" b="0">
+                <a:solidFill>
+                  <a:srgbClr val="000000"/>
+                </a:solidFill>
+                <a:latin typeface="Calibri"/>
+              </a:rPr>
+              <a:t>thỏa cả 3</a:t>
+            </a:r>
+          </a:p>
+        </p:txBody>
+      </p:sp>
+      <p:cxnSp>
+        <p:nvCxnSpPr>
+          <p:cNvPr id="11" name="Connector 10"/>
+          <p:cNvCxnSpPr/>
+          <p:nvPr/>
+        </p:nvCxnSpPr>
+        <p:spPr>
+          <a:xfrm flipH="1">
+            <a:off x="2635999" y="2670962"/>
+            <a:ext cx="1702889" cy="627512"/>
+          </a:xfrm>
+          <a:prstGeom prst="line">
+            <a:avLst/>
+          </a:prstGeom>
+          <a:ln w="15875">
+            <a:solidFill>
+              <a:srgbClr val="548235"/>
+            </a:solidFill>
+          </a:ln>
+        </p:spPr>
+        <p:style>
+          <a:lnRef idx="2">
+            <a:schemeClr val="accent1"/>
+          </a:lnRef>
+          <a:fillRef idx="0">
+            <a:schemeClr val="accent1"/>
+          </a:fillRef>
+          <a:effectRef idx="1">
+            <a:schemeClr val="accent1"/>
+          </a:effectRef>
+          <a:fontRef idx="minor">
+            <a:schemeClr val="tx1"/>
+          </a:fontRef>
+        </p:style>
+      </p:cxnSp>
+      <p:sp>
+        <p:nvSpPr>
+          <p:cNvPr id="12" name="Rounded Rectangle 11"/>
+          <p:cNvSpPr/>
+          <p:nvPr/>
+        </p:nvSpPr>
+        <p:spPr>
+          <a:xfrm>
+            <a:off x="976642" y="3122874"/>
+            <a:ext cx="1659357" cy="351200"/>
+          </a:xfrm>
+          <a:prstGeom prst="roundRect">
+            <a:avLst>
+              <a:gd name="adj" fmla="val 50000"/>
+            </a:avLst>
+          </a:prstGeom>
+          <a:solidFill>
+            <a:srgbClr val="EDF5E8"/>
+          </a:solidFill>
+          <a:ln w="15875">
+            <a:solidFill>
+              <a:srgbClr val="548235"/>
+            </a:solidFill>
+          </a:ln>
+          <a:effectLst/>
+        </p:spPr>
+        <p:style>
+          <a:lnRef idx="1">
+            <a:schemeClr val="accent1"/>
+          </a:lnRef>
+          <a:fillRef idx="3">
+            <a:schemeClr val="accent1"/>
+          </a:fillRef>
+          <a:effectRef idx="2">
+            <a:schemeClr val="accent1"/>
+          </a:effectRef>
+          <a:fontRef idx="minor">
+            <a:schemeClr val="lt1"/>
+          </a:fontRef>
+        </p:style>
+        <p:txBody>
+          <a:bodyPr rtlCol="0" anchor="ctr" wrap="none" lIns="64000" rIns="64000" tIns="25400" bIns="25400"/>
+          <a:lstStyle/>
+          <a:p>
+            <a:pPr algn="ctr"/>
+            <a:r>
+              <a:rPr sz="1300" b="0">
+                <a:solidFill>
+                  <a:srgbClr val="000000"/>
+                </a:solidFill>
+                <a:latin typeface="Calibri"/>
+              </a:rPr>
+              <a:t>Hệ dạng tam giác</a:t>
+            </a:r>
+          </a:p>
+        </p:txBody>
+      </p:sp>
+      <p:sp>
+        <p:nvSpPr>
+          <p:cNvPr id="13" name="Oval 12"/>
+          <p:cNvSpPr/>
+          <p:nvPr/>
+        </p:nvSpPr>
+        <p:spPr>
+          <a:xfrm>
+            <a:off x="3571948" y="2427575"/>
+            <a:ext cx="1533881" cy="486773"/>
+          </a:xfrm>
+          <a:prstGeom prst="ellipse">
+            <a:avLst/>
+          </a:prstGeom>
+          <a:solidFill>
+            <a:srgbClr val="E2EFDA"/>
+          </a:solidFill>
+          <a:ln w="31750">
+            <a:solidFill>
+              <a:srgbClr val="375623"/>
+            </a:solidFill>
+          </a:ln>
+          <a:effectLst/>
+        </p:spPr>
+        <p:style>
+          <a:lnRef idx="1">
+            <a:schemeClr val="accent1"/>
+          </a:lnRef>
+          <a:fillRef idx="3">
+            <a:schemeClr val="accent1"/>
+          </a:fillRef>
+          <a:effectRef idx="2">
+            <a:schemeClr val="accent1"/>
+          </a:effectRef>
+          <a:fontRef idx="minor">
+            <a:schemeClr val="lt1"/>
+          </a:fontRef>
+        </p:style>
+        <p:txBody>
+          <a:bodyPr rtlCol="0" anchor="ctr" wrap="none" lIns="64000" rIns="64000" tIns="25400" bIns="25400"/>
+          <a:lstStyle/>
+          <a:p>
+            <a:pPr algn="ctr"/>
+            <a:r>
+              <a:rPr sz="1500" b="1">
+                <a:solidFill>
+                  <a:srgbClr val="000000"/>
+                </a:solidFill>
+                <a:latin typeface="Calibri"/>
+              </a:rPr>
+              <a:t>Khái niệm</a:t>
+            </a:r>
+          </a:p>
+        </p:txBody>
+      </p:sp>
+      <p:cxnSp>
+        <p:nvCxnSpPr>
+          <p:cNvPr id="14" name="Connector 13"/>
+          <p:cNvCxnSpPr/>
+          <p:nvPr/>
+        </p:nvCxnSpPr>
+        <p:spPr>
+          <a:xfrm flipV="1">
+            <a:off x="6027267" y="2670962"/>
+            <a:ext cx="1688379" cy="1283818"/>
+          </a:xfrm>
+          <a:prstGeom prst="line">
+            <a:avLst/>
+          </a:prstGeom>
+          <a:ln w="44450">
+            <a:solidFill>
+              <a:srgbClr val="BF8F00"/>
+            </a:solidFill>
+          </a:ln>
+        </p:spPr>
+        <p:style>
+          <a:lnRef idx="2">
+            <a:schemeClr val="accent1"/>
+          </a:lnRef>
+          <a:fillRef idx="0">
+            <a:schemeClr val="accent1"/>
+          </a:fillRef>
+          <a:effectRef idx="1">
+            <a:schemeClr val="accent1"/>
+          </a:effectRef>
+          <a:fontRef idx="minor">
+            <a:schemeClr val="tx1"/>
+          </a:fontRef>
+        </p:style>
+      </p:cxnSp>
+      <p:cxnSp>
+        <p:nvCxnSpPr>
+          <p:cNvPr id="15" name="Connector 14"/>
+          <p:cNvCxnSpPr/>
+          <p:nvPr/>
+        </p:nvCxnSpPr>
+        <p:spPr>
+          <a:xfrm flipV="1">
+            <a:off x="7715646" y="2043450"/>
+            <a:ext cx="1788741" cy="627512"/>
+          </a:xfrm>
+          <a:prstGeom prst="line">
+            <a:avLst/>
+          </a:prstGeom>
+          <a:ln w="15875">
+            <a:solidFill>
+              <a:srgbClr val="BF8F00"/>
+            </a:solidFill>
+          </a:ln>
+        </p:spPr>
+        <p:style>
+          <a:lnRef idx="2">
+            <a:schemeClr val="accent1"/>
+          </a:lnRef>
+          <a:fillRef idx="0">
+            <a:schemeClr val="accent1"/>
+          </a:fillRef>
+          <a:effectRef idx="1">
+            <a:schemeClr val="accent1"/>
+          </a:effectRef>
+          <a:fontRef idx="minor">
+            <a:schemeClr val="tx1"/>
+          </a:fontRef>
+        </p:style>
+      </p:cxnSp>
+      <p:sp>
+        <p:nvSpPr>
+          <p:cNvPr id="16" name="Rounded Rectangle 15"/>
+          <p:cNvSpPr/>
+          <p:nvPr/>
+        </p:nvSpPr>
+        <p:spPr>
+          <a:xfrm>
+            <a:off x="9504387" y="1767138"/>
+            <a:ext cx="1487653" cy="552622"/>
+          </a:xfrm>
+          <a:prstGeom prst="roundRect">
+            <a:avLst>
+              <a:gd name="adj" fmla="val 50000"/>
+            </a:avLst>
+          </a:prstGeom>
+          <a:solidFill>
+            <a:srgbClr val="FFF8E1"/>
+          </a:solidFill>
+          <a:ln w="15875">
+            <a:solidFill>
+              <a:srgbClr val="BF8F00"/>
+            </a:solidFill>
+          </a:ln>
+          <a:effectLst/>
+        </p:spPr>
+        <p:style>
+          <a:lnRef idx="1">
+            <a:schemeClr val="accent1"/>
+          </a:lnRef>
+          <a:fillRef idx="3">
+            <a:schemeClr val="accent1"/>
+          </a:fillRef>
+          <a:effectRef idx="2">
+            <a:schemeClr val="accent1"/>
+          </a:effectRef>
+          <a:fontRef idx="minor">
+            <a:schemeClr val="lt1"/>
+          </a:fontRef>
+        </p:style>
+        <p:txBody>
+          <a:bodyPr rtlCol="0" anchor="ctr" wrap="none" lIns="64000" rIns="64000" tIns="25400" bIns="25400"/>
+          <a:lstStyle/>
+          <a:p>
+            <a:pPr algn="ctr"/>
+            <a:r>
+              <a:rPr sz="1300" b="1">
+                <a:solidFill>
+                  <a:srgbClr val="8B0000"/>
+                </a:solidFill>
+                <a:latin typeface="Calibri"/>
+              </a:rPr>
+              <a:t>Khử dần ẩn →</a:t>
+            </a:r>
+          </a:p>
+          <a:p>
+            <a:pPr algn="ctr"/>
+            <a:r>
+              <a:rPr sz="1300" b="1">
+                <a:solidFill>
+                  <a:srgbClr val="8B0000"/>
+                </a:solidFill>
+                <a:latin typeface="Calibri"/>
+              </a:rPr>
+              <a:t>dạng tam giác</a:t>
+            </a:r>
+          </a:p>
+        </p:txBody>
+      </p:sp>
+      <p:cxnSp>
+        <p:nvCxnSpPr>
+          <p:cNvPr id="17" name="Connector 16"/>
+          <p:cNvCxnSpPr/>
+          <p:nvPr/>
+        </p:nvCxnSpPr>
+        <p:spPr>
+          <a:xfrm>
+            <a:off x="7715646" y="2670962"/>
+            <a:ext cx="1617037" cy="0"/>
+          </a:xfrm>
+          <a:prstGeom prst="line">
+            <a:avLst/>
+          </a:prstGeom>
+          <a:ln w="15875">
+            <a:solidFill>
+              <a:srgbClr val="BF8F00"/>
+            </a:solidFill>
+          </a:ln>
+        </p:spPr>
+        <p:style>
+          <a:lnRef idx="2">
+            <a:schemeClr val="accent1"/>
+          </a:lnRef>
+          <a:fillRef idx="0">
+            <a:schemeClr val="accent1"/>
+          </a:fillRef>
+          <a:effectRef idx="1">
+            <a:schemeClr val="accent1"/>
+          </a:effectRef>
+          <a:fontRef idx="minor">
+            <a:schemeClr val="tx1"/>
+          </a:fontRef>
+        </p:style>
+      </p:cxnSp>
+      <p:sp>
+        <p:nvSpPr>
+          <p:cNvPr id="18" name="Rounded Rectangle 17"/>
+          <p:cNvSpPr/>
+          <p:nvPr/>
+        </p:nvSpPr>
+        <p:spPr>
+          <a:xfrm>
+            <a:off x="9332683" y="2394651"/>
+            <a:ext cx="1831061" cy="552622"/>
+          </a:xfrm>
+          <a:prstGeom prst="roundRect">
+            <a:avLst>
+              <a:gd name="adj" fmla="val 50000"/>
+            </a:avLst>
+          </a:prstGeom>
+          <a:solidFill>
+            <a:srgbClr val="FFF8E1"/>
+          </a:solidFill>
+          <a:ln w="15875">
+            <a:solidFill>
+              <a:srgbClr val="BF8F00"/>
+            </a:solidFill>
+          </a:ln>
+          <a:effectLst/>
+        </p:spPr>
+        <p:style>
+          <a:lnRef idx="1">
+            <a:schemeClr val="accent1"/>
+          </a:lnRef>
+          <a:fillRef idx="3">
+            <a:schemeClr val="accent1"/>
+          </a:fillRef>
+          <a:effectRef idx="2">
+            <a:schemeClr val="accent1"/>
+          </a:effectRef>
+          <a:fontRef idx="minor">
+            <a:schemeClr val="lt1"/>
+          </a:fontRef>
+        </p:style>
+        <p:txBody>
+          <a:bodyPr rtlCol="0" anchor="ctr" wrap="none" lIns="64000" rIns="64000" tIns="25400" bIns="25400"/>
+          <a:lstStyle/>
+          <a:p>
+            <a:pPr algn="ctr"/>
+            <a:r>
+              <a:rPr sz="1300" b="0">
+                <a:solidFill>
+                  <a:srgbClr val="000000"/>
+                </a:solidFill>
+                <a:latin typeface="Calibri"/>
+              </a:rPr>
+              <a:t>Giải ngược từ dưới</a:t>
+            </a:r>
+          </a:p>
+          <a:p>
+            <a:pPr algn="ctr"/>
+            <a:r>
+              <a:rPr sz="1300" b="0">
+                <a:solidFill>
+                  <a:srgbClr val="000000"/>
+                </a:solidFill>
+                <a:latin typeface="Calibri"/>
+              </a:rPr>
+              <a:t>lên</a:t>
+            </a:r>
+          </a:p>
+        </p:txBody>
+      </p:sp>
+      <p:cxnSp>
+        <p:nvCxnSpPr>
+          <p:cNvPr id="19" name="Connector 18"/>
+          <p:cNvCxnSpPr/>
+          <p:nvPr/>
+        </p:nvCxnSpPr>
+        <p:spPr>
+          <a:xfrm>
+            <a:off x="7715646" y="2670962"/>
+            <a:ext cx="1788741" cy="627512"/>
+          </a:xfrm>
+          <a:prstGeom prst="line">
+            <a:avLst/>
+          </a:prstGeom>
+          <a:ln w="15875">
+            <a:solidFill>
+              <a:srgbClr val="BF8F00"/>
+            </a:solidFill>
+          </a:ln>
+        </p:spPr>
+        <p:style>
+          <a:lnRef idx="2">
+            <a:schemeClr val="accent1"/>
+          </a:lnRef>
+          <a:fillRef idx="0">
+            <a:schemeClr val="accent1"/>
+          </a:fillRef>
+          <a:effectRef idx="1">
+            <a:schemeClr val="accent1"/>
+          </a:effectRef>
+          <a:fontRef idx="minor">
+            <a:schemeClr val="tx1"/>
+          </a:fontRef>
+        </p:style>
+      </p:cxnSp>
+      <p:sp>
+        <p:nvSpPr>
+          <p:cNvPr id="20" name="Rounded Rectangle 19"/>
+          <p:cNvSpPr/>
+          <p:nvPr/>
+        </p:nvSpPr>
+        <p:spPr>
+          <a:xfrm>
+            <a:off x="9504387" y="3022163"/>
+            <a:ext cx="1487653" cy="552622"/>
+          </a:xfrm>
+          <a:prstGeom prst="roundRect">
+            <a:avLst>
+              <a:gd name="adj" fmla="val 50000"/>
+            </a:avLst>
+          </a:prstGeom>
+          <a:solidFill>
+            <a:srgbClr val="FFF8E1"/>
+          </a:solidFill>
+          <a:ln w="15875">
+            <a:solidFill>
+              <a:srgbClr val="BF8F00"/>
+            </a:solidFill>
+          </a:ln>
+          <a:effectLst/>
+        </p:spPr>
+        <p:style>
+          <a:lnRef idx="1">
+            <a:schemeClr val="accent1"/>
+          </a:lnRef>
+          <a:fillRef idx="3">
+            <a:schemeClr val="accent1"/>
+          </a:fillRef>
+          <a:effectRef idx="2">
+            <a:schemeClr val="accent1"/>
+          </a:effectRef>
+          <a:fontRef idx="minor">
+            <a:schemeClr val="lt1"/>
+          </a:fontRef>
+        </p:style>
+        <p:txBody>
+          <a:bodyPr rtlCol="0" anchor="ctr" wrap="none" lIns="64000" rIns="64000" tIns="25400" bIns="25400"/>
+          <a:lstStyle/>
+          <a:p>
+            <a:pPr algn="ctr"/>
+            <a:r>
+              <a:rPr sz="1300" b="0">
+                <a:solidFill>
+                  <a:srgbClr val="000000"/>
+                </a:solidFill>
+                <a:latin typeface="Calibri"/>
+              </a:rPr>
+              <a:t>Vô nghiệm / vô</a:t>
+            </a:r>
+          </a:p>
+          <a:p>
+            <a:pPr algn="ctr"/>
+            <a:r>
+              <a:rPr sz="1300" b="0">
+                <a:solidFill>
+                  <a:srgbClr val="000000"/>
+                </a:solidFill>
+                <a:latin typeface="Calibri"/>
+              </a:rPr>
+              <a:t>số nghiệm</a:t>
+            </a:r>
+          </a:p>
+        </p:txBody>
+      </p:sp>
+      <p:sp>
+        <p:nvSpPr>
+          <p:cNvPr id="21" name="Oval 20"/>
+          <p:cNvSpPr/>
+          <p:nvPr/>
+        </p:nvSpPr>
+        <p:spPr>
+          <a:xfrm>
+            <a:off x="6393969" y="2427575"/>
+            <a:ext cx="2643353" cy="486773"/>
+          </a:xfrm>
+          <a:prstGeom prst="ellipse">
+            <a:avLst/>
+          </a:prstGeom>
+          <a:solidFill>
+            <a:srgbClr val="FFF2CC"/>
+          </a:solidFill>
+          <a:ln w="31750">
+            <a:solidFill>
+              <a:srgbClr val="BF8F00"/>
+            </a:solidFill>
+          </a:ln>
+          <a:effectLst/>
+        </p:spPr>
+        <p:style>
+          <a:lnRef idx="1">
+            <a:schemeClr val="accent1"/>
+          </a:lnRef>
+          <a:fillRef idx="3">
+            <a:schemeClr val="accent1"/>
+          </a:fillRef>
+          <a:effectRef idx="2">
+            <a:schemeClr val="accent1"/>
+          </a:effectRef>
+          <a:fontRef idx="minor">
+            <a:schemeClr val="lt1"/>
+          </a:fontRef>
+        </p:style>
+        <p:txBody>
+          <a:bodyPr rtlCol="0" anchor="ctr" wrap="none" lIns="64000" rIns="64000" tIns="25400" bIns="25400"/>
+          <a:lstStyle/>
+          <a:p>
+            <a:pPr algn="ctr"/>
+            <a:r>
+              <a:rPr sz="1500" b="1">
+                <a:solidFill>
+                  <a:srgbClr val="000000"/>
+                </a:solidFill>
+                <a:latin typeface="Calibri"/>
+              </a:rPr>
+              <a:t>Phương pháp Gauss</a:t>
+            </a:r>
+          </a:p>
+        </p:txBody>
+      </p:sp>
+      <p:cxnSp>
+        <p:nvCxnSpPr>
+          <p:cNvPr id="22" name="Connector 21"/>
+          <p:cNvCxnSpPr/>
+          <p:nvPr/>
+        </p:nvCxnSpPr>
+        <p:spPr>
+          <a:xfrm flipH="1">
+            <a:off x="4338888" y="3954780"/>
+            <a:ext cx="1688379" cy="1283817"/>
+          </a:xfrm>
+          <a:prstGeom prst="line">
+            <a:avLst/>
+          </a:prstGeom>
+          <a:ln w="44450">
+            <a:solidFill>
+              <a:srgbClr val="2F5597"/>
+            </a:solidFill>
+          </a:ln>
+        </p:spPr>
+        <p:style>
+          <a:lnRef idx="2">
+            <a:schemeClr val="accent1"/>
+          </a:lnRef>
+          <a:fillRef idx="0">
+            <a:schemeClr val="accent1"/>
+          </a:fillRef>
+          <a:effectRef idx="1">
+            <a:schemeClr val="accent1"/>
+          </a:effectRef>
+          <a:fontRef idx="minor">
+            <a:schemeClr val="tx1"/>
+          </a:fontRef>
+        </p:style>
+      </p:cxnSp>
+      <p:cxnSp>
+        <p:nvCxnSpPr>
+          <p:cNvPr id="23" name="Connector 22"/>
+          <p:cNvCxnSpPr/>
+          <p:nvPr/>
+        </p:nvCxnSpPr>
+        <p:spPr>
+          <a:xfrm flipH="1" flipV="1">
+            <a:off x="2550147" y="5025552"/>
+            <a:ext cx="1788741" cy="213045"/>
+          </a:xfrm>
+          <a:prstGeom prst="line">
+            <a:avLst/>
+          </a:prstGeom>
+          <a:ln w="15875">
+            <a:solidFill>
+              <a:srgbClr val="2F5597"/>
+            </a:solidFill>
+          </a:ln>
+        </p:spPr>
+        <p:style>
+          <a:lnRef idx="2">
+            <a:schemeClr val="accent1"/>
+          </a:lnRef>
+          <a:fillRef idx="0">
+            <a:schemeClr val="accent1"/>
+          </a:fillRef>
+          <a:effectRef idx="1">
+            <a:schemeClr val="accent1"/>
+          </a:effectRef>
+          <a:fontRef idx="minor">
+            <a:schemeClr val="tx1"/>
+          </a:fontRef>
+        </p:style>
+      </p:cxnSp>
+      <p:sp>
+        <p:nvSpPr>
+          <p:cNvPr id="24" name="Rounded Rectangle 23"/>
+          <p:cNvSpPr/>
+          <p:nvPr/>
+        </p:nvSpPr>
+        <p:spPr>
+          <a:xfrm>
+            <a:off x="1062494" y="4749241"/>
+            <a:ext cx="1487653" cy="552622"/>
+          </a:xfrm>
+          <a:prstGeom prst="roundRect">
+            <a:avLst>
+              <a:gd name="adj" fmla="val 50000"/>
+            </a:avLst>
+          </a:prstGeom>
+          <a:solidFill>
+            <a:srgbClr val="E3EEF9"/>
+          </a:solidFill>
+          <a:ln w="15875">
+            <a:solidFill>
+              <a:srgbClr val="2F5597"/>
+            </a:solidFill>
+          </a:ln>
+          <a:effectLst/>
+        </p:spPr>
+        <p:style>
+          <a:lnRef idx="1">
+            <a:schemeClr val="accent1"/>
+          </a:lnRef>
+          <a:fillRef idx="3">
+            <a:schemeClr val="accent1"/>
+          </a:fillRef>
+          <a:effectRef idx="2">
+            <a:schemeClr val="accent1"/>
+          </a:effectRef>
+          <a:fontRef idx="minor">
+            <a:schemeClr val="lt1"/>
+          </a:fontRef>
+        </p:style>
+        <p:txBody>
+          <a:bodyPr rtlCol="0" anchor="ctr" wrap="none" lIns="64000" rIns="64000" tIns="25400" bIns="25400"/>
+          <a:lstStyle/>
+          <a:p>
+            <a:pPr algn="ctr"/>
+            <a:r>
+              <a:rPr sz="1300" b="0">
+                <a:solidFill>
+                  <a:srgbClr val="000000"/>
+                </a:solidFill>
+                <a:latin typeface="Calibri"/>
+              </a:rPr>
+              <a:t>Chế độ giải hệ</a:t>
+            </a:r>
+          </a:p>
+          <a:p>
+            <a:pPr algn="ctr"/>
+            <a:r>
+              <a:rPr sz="1300" b="0">
+                <a:solidFill>
+                  <a:srgbClr val="000000"/>
+                </a:solidFill>
+                <a:latin typeface="Calibri"/>
+              </a:rPr>
+              <a:t>3 ẩn</a:t>
+            </a:r>
+          </a:p>
+        </p:txBody>
+      </p:sp>
+      <p:cxnSp>
+        <p:nvCxnSpPr>
+          <p:cNvPr id="25" name="Connector 24"/>
+          <p:cNvCxnSpPr/>
+          <p:nvPr/>
+        </p:nvCxnSpPr>
+        <p:spPr>
+          <a:xfrm flipH="1">
+            <a:off x="2764777" y="5238597"/>
+            <a:ext cx="1574111" cy="313756"/>
+          </a:xfrm>
+          <a:prstGeom prst="line">
+            <a:avLst/>
+          </a:prstGeom>
+          <a:ln w="15875">
+            <a:solidFill>
+              <a:srgbClr val="2F5597"/>
+            </a:solidFill>
+          </a:ln>
+        </p:spPr>
+        <p:style>
+          <a:lnRef idx="2">
+            <a:schemeClr val="accent1"/>
+          </a:lnRef>
+          <a:fillRef idx="0">
+            <a:schemeClr val="accent1"/>
+          </a:fillRef>
+          <a:effectRef idx="1">
+            <a:schemeClr val="accent1"/>
+          </a:effectRef>
+          <a:fontRef idx="minor">
+            <a:schemeClr val="tx1"/>
+          </a:fontRef>
+        </p:style>
+      </p:cxnSp>
+      <p:sp>
+        <p:nvSpPr>
+          <p:cNvPr id="26" name="Rounded Rectangle 25"/>
+          <p:cNvSpPr/>
+          <p:nvPr/>
+        </p:nvSpPr>
+        <p:spPr>
+          <a:xfrm>
+            <a:off x="847864" y="5376753"/>
+            <a:ext cx="1916913" cy="351200"/>
+          </a:xfrm>
+          <a:prstGeom prst="roundRect">
+            <a:avLst>
+              <a:gd name="adj" fmla="val 50000"/>
+            </a:avLst>
+          </a:prstGeom>
+          <a:solidFill>
+            <a:srgbClr val="E3EEF9"/>
+          </a:solidFill>
+          <a:ln w="15875">
+            <a:solidFill>
+              <a:srgbClr val="2F5597"/>
+            </a:solidFill>
+          </a:ln>
+          <a:effectLst/>
+        </p:spPr>
+        <p:style>
+          <a:lnRef idx="1">
+            <a:schemeClr val="accent1"/>
+          </a:lnRef>
+          <a:fillRef idx="3">
+            <a:schemeClr val="accent1"/>
+          </a:fillRef>
+          <a:effectRef idx="2">
+            <a:schemeClr val="accent1"/>
+          </a:effectRef>
+          <a:fontRef idx="minor">
+            <a:schemeClr val="lt1"/>
+          </a:fontRef>
+        </p:style>
+        <p:txBody>
+          <a:bodyPr rtlCol="0" anchor="ctr" wrap="none" lIns="64000" rIns="64000" tIns="25400" bIns="25400"/>
+          <a:lstStyle/>
+          <a:p>
+            <a:pPr algn="ctr"/>
+            <a:r>
+              <a:rPr sz="1300" b="0">
+                <a:solidFill>
+                  <a:srgbClr val="000000"/>
+                </a:solidFill>
+                <a:latin typeface="Calibri"/>
+              </a:rPr>
+              <a:t>Kiểm tra lại nghiệm</a:t>
+            </a:r>
+          </a:p>
+        </p:txBody>
+      </p:sp>
+      <p:sp>
+        <p:nvSpPr>
+          <p:cNvPr id="27" name="Oval 26"/>
+          <p:cNvSpPr/>
+          <p:nvPr/>
+        </p:nvSpPr>
+        <p:spPr>
+          <a:xfrm>
+            <a:off x="3363922" y="4826713"/>
+            <a:ext cx="1949933" cy="823767"/>
+          </a:xfrm>
+          <a:prstGeom prst="ellipse">
+            <a:avLst/>
+          </a:prstGeom>
+          <a:solidFill>
+            <a:srgbClr val="E2EFDA"/>
+          </a:solidFill>
+          <a:ln w="31750">
+            <a:solidFill>
+              <a:srgbClr val="375623"/>
+            </a:solidFill>
+          </a:ln>
+          <a:effectLst/>
+        </p:spPr>
+        <p:style>
+          <a:lnRef idx="1">
+            <a:schemeClr val="accent1"/>
+          </a:lnRef>
+          <a:fillRef idx="3">
+            <a:schemeClr val="accent1"/>
+          </a:fillRef>
+          <a:effectRef idx="2">
+            <a:schemeClr val="accent1"/>
+          </a:effectRef>
+          <a:fontRef idx="minor">
+            <a:schemeClr val="lt1"/>
+          </a:fontRef>
+        </p:style>
+        <p:txBody>
+          <a:bodyPr rtlCol="0" anchor="ctr" wrap="none" lIns="64000" rIns="64000" tIns="25400" bIns="25400"/>
+          <a:lstStyle/>
+          <a:p>
+            <a:pPr algn="ctr"/>
+            <a:r>
+              <a:rPr sz="1500" b="1">
+                <a:solidFill>
+                  <a:srgbClr val="000000"/>
+                </a:solidFill>
+                <a:latin typeface="Calibri"/>
+              </a:rPr>
+              <a:t>Máy tính cầm</a:t>
+            </a:r>
+          </a:p>
+          <a:p>
+            <a:pPr algn="ctr"/>
+            <a:r>
+              <a:rPr sz="1500" b="1">
+                <a:solidFill>
+                  <a:srgbClr val="000000"/>
+                </a:solidFill>
+                <a:latin typeface="Calibri"/>
+              </a:rPr>
+              <a:t>tay</a:t>
+            </a:r>
+          </a:p>
+        </p:txBody>
+      </p:sp>
+      <p:cxnSp>
+        <p:nvCxnSpPr>
+          <p:cNvPr id="28" name="Connector 27"/>
+          <p:cNvCxnSpPr/>
+          <p:nvPr/>
+        </p:nvCxnSpPr>
+        <p:spPr>
+          <a:xfrm>
+            <a:off x="6027267" y="3954780"/>
+            <a:ext cx="1688379" cy="1283817"/>
+          </a:xfrm>
+          <a:prstGeom prst="line">
+            <a:avLst/>
+          </a:prstGeom>
+          <a:ln w="44450">
+            <a:solidFill>
+              <a:srgbClr val="7030A0"/>
+            </a:solidFill>
+          </a:ln>
+        </p:spPr>
+        <p:style>
+          <a:lnRef idx="2">
+            <a:schemeClr val="accent1"/>
+          </a:lnRef>
+          <a:fillRef idx="0">
+            <a:schemeClr val="accent1"/>
+          </a:fillRef>
+          <a:effectRef idx="1">
+            <a:schemeClr val="accent1"/>
+          </a:effectRef>
+          <a:fontRef idx="minor">
+            <a:schemeClr val="tx1"/>
+          </a:fontRef>
+        </p:style>
+      </p:cxnSp>
+      <p:cxnSp>
+        <p:nvCxnSpPr>
+          <p:cNvPr id="29" name="Connector 28"/>
+          <p:cNvCxnSpPr/>
+          <p:nvPr/>
+        </p:nvCxnSpPr>
+        <p:spPr>
+          <a:xfrm flipV="1">
+            <a:off x="7715646" y="4611085"/>
+            <a:ext cx="1617037" cy="627512"/>
+          </a:xfrm>
+          <a:prstGeom prst="line">
+            <a:avLst/>
+          </a:prstGeom>
+          <a:ln w="15875">
+            <a:solidFill>
+              <a:srgbClr val="7030A0"/>
+            </a:solidFill>
+          </a:ln>
+        </p:spPr>
+        <p:style>
+          <a:lnRef idx="2">
+            <a:schemeClr val="accent1"/>
+          </a:lnRef>
+          <a:fillRef idx="0">
+            <a:schemeClr val="accent1"/>
+          </a:fillRef>
+          <a:effectRef idx="1">
+            <a:schemeClr val="accent1"/>
+          </a:effectRef>
+          <a:fontRef idx="minor">
+            <a:schemeClr val="tx1"/>
+          </a:fontRef>
+        </p:style>
+      </p:cxnSp>
+      <p:sp>
+        <p:nvSpPr>
+          <p:cNvPr id="30" name="Rounded Rectangle 29"/>
+          <p:cNvSpPr/>
+          <p:nvPr/>
+        </p:nvSpPr>
+        <p:spPr>
+          <a:xfrm>
+            <a:off x="9332683" y="4334774"/>
+            <a:ext cx="1831061" cy="552622"/>
+          </a:xfrm>
+          <a:prstGeom prst="roundRect">
+            <a:avLst>
+              <a:gd name="adj" fmla="val 50000"/>
+            </a:avLst>
+          </a:prstGeom>
+          <a:solidFill>
+            <a:srgbClr val="F3E8F7"/>
+          </a:solidFill>
+          <a:ln w="15875">
+            <a:solidFill>
+              <a:srgbClr val="7030A0"/>
+            </a:solidFill>
+          </a:ln>
+          <a:effectLst/>
+        </p:spPr>
+        <p:style>
+          <a:lnRef idx="1">
+            <a:schemeClr val="accent1"/>
+          </a:lnRef>
+          <a:fillRef idx="3">
+            <a:schemeClr val="accent1"/>
+          </a:fillRef>
+          <a:effectRef idx="2">
+            <a:schemeClr val="accent1"/>
+          </a:effectRef>
+          <a:fontRef idx="minor">
+            <a:schemeClr val="lt1"/>
+          </a:fontRef>
+        </p:style>
+        <p:txBody>
+          <a:bodyPr rtlCol="0" anchor="ctr" wrap="none" lIns="64000" rIns="64000" tIns="25400" bIns="25400"/>
+          <a:lstStyle/>
+          <a:p>
+            <a:pPr algn="ctr"/>
+            <a:r>
+              <a:rPr sz="1300" b="0">
+                <a:solidFill>
+                  <a:srgbClr val="000000"/>
+                </a:solidFill>
+                <a:latin typeface="Calibri"/>
+              </a:rPr>
+              <a:t>Bài toán pha trộn,</a:t>
+            </a:r>
+          </a:p>
+          <a:p>
+            <a:pPr algn="ctr"/>
+            <a:r>
+              <a:rPr sz="1300" b="0">
+                <a:solidFill>
+                  <a:srgbClr val="000000"/>
+                </a:solidFill>
+                <a:latin typeface="Calibri"/>
+              </a:rPr>
+              <a:t>phân bón N–P–K</a:t>
+            </a:r>
+          </a:p>
+        </p:txBody>
+      </p:sp>
+      <p:cxnSp>
+        <p:nvCxnSpPr>
+          <p:cNvPr id="31" name="Connector 30"/>
+          <p:cNvCxnSpPr/>
+          <p:nvPr/>
+        </p:nvCxnSpPr>
+        <p:spPr>
+          <a:xfrm>
+            <a:off x="7715646" y="5238597"/>
+            <a:ext cx="1488259" cy="0"/>
+          </a:xfrm>
+          <a:prstGeom prst="line">
+            <a:avLst/>
+          </a:prstGeom>
+          <a:ln w="15875">
+            <a:solidFill>
+              <a:srgbClr val="7030A0"/>
+            </a:solidFill>
+          </a:ln>
+        </p:spPr>
+        <p:style>
+          <a:lnRef idx="2">
+            <a:schemeClr val="accent1"/>
+          </a:lnRef>
+          <a:fillRef idx="0">
+            <a:schemeClr val="accent1"/>
+          </a:fillRef>
+          <a:effectRef idx="1">
+            <a:schemeClr val="accent1"/>
+          </a:effectRef>
+          <a:fontRef idx="minor">
+            <a:schemeClr val="tx1"/>
+          </a:fontRef>
+        </p:style>
+      </p:cxnSp>
+      <p:sp>
+        <p:nvSpPr>
+          <p:cNvPr id="32" name="Rounded Rectangle 31"/>
+          <p:cNvSpPr/>
+          <p:nvPr/>
+        </p:nvSpPr>
+        <p:spPr>
+          <a:xfrm>
+            <a:off x="9203905" y="4962286"/>
+            <a:ext cx="2088617" cy="552622"/>
+          </a:xfrm>
+          <a:prstGeom prst="roundRect">
+            <a:avLst>
+              <a:gd name="adj" fmla="val 50000"/>
+            </a:avLst>
+          </a:prstGeom>
+          <a:solidFill>
+            <a:srgbClr val="F3E8F7"/>
+          </a:solidFill>
+          <a:ln w="15875">
+            <a:solidFill>
+              <a:srgbClr val="7030A0"/>
+            </a:solidFill>
+          </a:ln>
+          <a:effectLst/>
+        </p:spPr>
+        <p:style>
+          <a:lnRef idx="1">
+            <a:schemeClr val="accent1"/>
+          </a:lnRef>
+          <a:fillRef idx="3">
+            <a:schemeClr val="accent1"/>
+          </a:fillRef>
+          <a:effectRef idx="2">
+            <a:schemeClr val="accent1"/>
+          </a:effectRef>
+          <a:fontRef idx="minor">
+            <a:schemeClr val="lt1"/>
+          </a:fontRef>
+        </p:style>
+        <p:txBody>
+          <a:bodyPr rtlCol="0" anchor="ctr" wrap="none" lIns="64000" rIns="64000" tIns="25400" bIns="25400"/>
+          <a:lstStyle/>
+          <a:p>
+            <a:pPr algn="ctr"/>
+            <a:r>
+              <a:rPr sz="1300" b="0">
+                <a:solidFill>
+                  <a:srgbClr val="000000"/>
+                </a:solidFill>
+                <a:latin typeface="Calibri"/>
+              </a:rPr>
+              <a:t>Cân bằng phương trình</a:t>
+            </a:r>
+          </a:p>
+          <a:p>
+            <a:pPr algn="ctr"/>
+            <a:r>
+              <a:rPr sz="1300" b="0">
+                <a:solidFill>
+                  <a:srgbClr val="000000"/>
+                </a:solidFill>
+                <a:latin typeface="Calibri"/>
+              </a:rPr>
+              <a:t>hoá học</a:t>
+            </a:r>
+          </a:p>
+        </p:txBody>
+      </p:sp>
+      <p:cxnSp>
+        <p:nvCxnSpPr>
+          <p:cNvPr id="33" name="Connector 32"/>
+          <p:cNvCxnSpPr/>
+          <p:nvPr/>
+        </p:nvCxnSpPr>
+        <p:spPr>
+          <a:xfrm>
+            <a:off x="7715646" y="5238597"/>
+            <a:ext cx="1702889" cy="627512"/>
+          </a:xfrm>
+          <a:prstGeom prst="line">
+            <a:avLst/>
+          </a:prstGeom>
+          <a:ln w="15875">
+            <a:solidFill>
+              <a:srgbClr val="7030A0"/>
+            </a:solidFill>
+          </a:ln>
+        </p:spPr>
+        <p:style>
+          <a:lnRef idx="2">
+            <a:schemeClr val="accent1"/>
+          </a:lnRef>
+          <a:fillRef idx="0">
+            <a:schemeClr val="accent1"/>
+          </a:fillRef>
+          <a:effectRef idx="1">
+            <a:schemeClr val="accent1"/>
+          </a:effectRef>
+          <a:fontRef idx="minor">
+            <a:schemeClr val="tx1"/>
+          </a:fontRef>
+        </p:style>
+      </p:cxnSp>
+      <p:sp>
+        <p:nvSpPr>
+          <p:cNvPr id="34" name="Rounded Rectangle 33"/>
+          <p:cNvSpPr/>
+          <p:nvPr/>
+        </p:nvSpPr>
+        <p:spPr>
+          <a:xfrm>
+            <a:off x="9418535" y="5589798"/>
+            <a:ext cx="1659357" cy="552622"/>
+          </a:xfrm>
+          <a:prstGeom prst="roundRect">
+            <a:avLst>
+              <a:gd name="adj" fmla="val 50000"/>
+            </a:avLst>
+          </a:prstGeom>
+          <a:solidFill>
+            <a:srgbClr val="F3E8F7"/>
+          </a:solidFill>
+          <a:ln w="15875">
+            <a:solidFill>
+              <a:srgbClr val="7030A0"/>
+            </a:solidFill>
+          </a:ln>
+          <a:effectLst/>
+        </p:spPr>
+        <p:style>
+          <a:lnRef idx="1">
+            <a:schemeClr val="accent1"/>
+          </a:lnRef>
+          <a:fillRef idx="3">
+            <a:schemeClr val="accent1"/>
+          </a:fillRef>
+          <a:effectRef idx="2">
+            <a:schemeClr val="accent1"/>
+          </a:effectRef>
+          <a:fontRef idx="minor">
+            <a:schemeClr val="lt1"/>
+          </a:fontRef>
+        </p:style>
+        <p:txBody>
+          <a:bodyPr rtlCol="0" anchor="ctr" wrap="none" lIns="64000" rIns="64000" tIns="25400" bIns="25400"/>
+          <a:lstStyle/>
+          <a:p>
+            <a:pPr algn="ctr"/>
+            <a:r>
+              <a:rPr sz="1300" b="0">
+                <a:solidFill>
+                  <a:srgbClr val="000000"/>
+                </a:solidFill>
+                <a:latin typeface="Calibri"/>
+              </a:rPr>
+              <a:t>Bài toán kinh tế</a:t>
+            </a:r>
+          </a:p>
+          <a:p>
+            <a:pPr algn="ctr"/>
+            <a:r>
+              <a:rPr sz="1300" b="0">
+                <a:solidFill>
+                  <a:srgbClr val="000000"/>
+                </a:solidFill>
+                <a:latin typeface="Calibri"/>
+              </a:rPr>
+              <a:t>– sản xuất</a:t>
+            </a:r>
+          </a:p>
+        </p:txBody>
+      </p:sp>
+      <p:sp>
+        <p:nvSpPr>
+          <p:cNvPr id="35" name="Oval 34"/>
+          <p:cNvSpPr/>
+          <p:nvPr/>
+        </p:nvSpPr>
+        <p:spPr>
+          <a:xfrm>
+            <a:off x="7018047" y="4995210"/>
+            <a:ext cx="1395197" cy="486773"/>
+          </a:xfrm>
+          <a:prstGeom prst="ellipse">
+            <a:avLst/>
+          </a:prstGeom>
+          <a:solidFill>
+            <a:srgbClr val="FFF2CC"/>
+          </a:solidFill>
+          <a:ln w="31750">
+            <a:solidFill>
+              <a:srgbClr val="BF8F00"/>
+            </a:solidFill>
+          </a:ln>
+          <a:effectLst/>
+        </p:spPr>
+        <p:style>
+          <a:lnRef idx="1">
+            <a:schemeClr val="accent1"/>
+          </a:lnRef>
+          <a:fillRef idx="3">
+            <a:schemeClr val="accent1"/>
+          </a:fillRef>
+          <a:effectRef idx="2">
+            <a:schemeClr val="accent1"/>
+          </a:effectRef>
+          <a:fontRef idx="minor">
+            <a:schemeClr val="lt1"/>
+          </a:fontRef>
+        </p:style>
+        <p:txBody>
+          <a:bodyPr rtlCol="0" anchor="ctr" wrap="none" lIns="64000" rIns="64000" tIns="25400" bIns="25400"/>
+          <a:lstStyle/>
+          <a:p>
+            <a:pPr algn="ctr"/>
+            <a:r>
+              <a:rPr sz="1500" b="1">
+                <a:solidFill>
+                  <a:srgbClr val="000000"/>
+                </a:solidFill>
+                <a:latin typeface="Calibri"/>
+              </a:rPr>
+              <a:t>Ứng dụng</a:t>
+            </a:r>
+          </a:p>
+        </p:txBody>
+      </p:sp>
+      <p:sp>
+        <p:nvSpPr>
+          <p:cNvPr id="36" name="Oval 35"/>
+          <p:cNvSpPr/>
+          <p:nvPr/>
+        </p:nvSpPr>
+        <p:spPr>
+          <a:xfrm>
+            <a:off x="4705590" y="3089696"/>
+            <a:ext cx="2643353" cy="1730166"/>
+          </a:xfrm>
+          <a:prstGeom prst="ellipse">
+            <a:avLst/>
+          </a:prstGeom>
+          <a:solidFill>
+            <a:srgbClr val="002060"/>
+          </a:solidFill>
+          <a:ln w="25400">
+            <a:solidFill>
+              <a:srgbClr val="000B1E"/>
+            </a:solidFill>
+          </a:ln>
+          <a:effectLst/>
+        </p:spPr>
+        <p:style>
+          <a:lnRef idx="1">
+            <a:schemeClr val="accent1"/>
+          </a:lnRef>
+          <a:fillRef idx="3">
+            <a:schemeClr val="accent1"/>
+          </a:fillRef>
+          <a:effectRef idx="2">
+            <a:schemeClr val="accent1"/>
+          </a:effectRef>
+          <a:fontRef idx="minor">
+            <a:schemeClr val="lt1"/>
+          </a:fontRef>
+        </p:style>
+        <p:txBody>
+          <a:bodyPr rtlCol="0" anchor="ctr" wrap="none" lIns="64000" rIns="64000" tIns="25400" bIns="25400"/>
+          <a:lstStyle/>
+          <a:p>
+            <a:pPr algn="ctr"/>
+            <a:r>
+              <a:rPr sz="1700" b="1">
+                <a:solidFill>
+                  <a:srgbClr val="FFFFFF"/>
+                </a:solidFill>
+                <a:latin typeface="Calibri"/>
+              </a:rPr>
+              <a:t>CHUYÊN ĐỀ 1:</a:t>
+            </a:r>
+          </a:p>
+          <a:p>
+            <a:pPr algn="ctr"/>
+            <a:r>
+              <a:rPr sz="1700" b="1">
+                <a:solidFill>
+                  <a:srgbClr val="FFFFFF"/>
+                </a:solidFill>
+                <a:latin typeface="Calibri"/>
+              </a:rPr>
+              <a:t>HỆ PHƯƠNG TRÌNH</a:t>
+            </a:r>
+          </a:p>
+          <a:p>
+            <a:pPr algn="ctr"/>
+            <a:r>
+              <a:rPr sz="1700" b="1">
+                <a:solidFill>
+                  <a:srgbClr val="FFFFFF"/>
+                </a:solidFill>
+                <a:latin typeface="Calibri"/>
+              </a:rPr>
+              <a:t>BẬC NHẤT BA</a:t>
+            </a:r>
+          </a:p>
+          <a:p>
+            <a:pPr algn="ctr"/>
+            <a:r>
+              <a:rPr sz="1700" b="1">
+                <a:solidFill>
+                  <a:srgbClr val="FFFFFF"/>
+                </a:solidFill>
+                <a:latin typeface="Calibri"/>
+              </a:rPr>
+              <a:t>ẨN</a:t>
+            </a:r>
+          </a:p>
+        </p:txBody>
+      </p:sp>
     </p:spTree>
   </p:cSld>
   <p:clrMapOvr>
